--- a/02-精益培训/02-培训材料/06-精益六西格玛培训课件.pptx
+++ b/02-精益培训/02-培训材料/06-精益六西格玛培训课件.pptx
@@ -3796,7 +3796,7 @@
                           <a:latin typeface="SimSun"/>
                           <a:rFonts a:latin="SimSun" a:ea="SimSun"/>
                         </a:rPr>
-                        <a:t>较好水平（紧固件目标）</a:t>
+                        <a:t>较好水平（产品目标）</a:t>
                       </a:r>
                     </a:p>
                   </a:txBody>
@@ -4744,7 +4744,7 @@
                 <a:latin typeface="SimHei"/>
                 <a:rFonts a:latin="SimHei" a:ea="SimHei"/>
               </a:rPr>
-              <a:t>紧固件行业应用案例</a:t>
+              <a:t>制造工序应用案例</a:t>
             </a:r>
           </a:p>
         </p:txBody>
@@ -4784,7 +4784,7 @@
                 <a:latin typeface="SimSun"/>
                 <a:rFonts a:latin="SimSun" a:ea="SimSun"/>
               </a:rPr>
-              <a:t>案例：降低六角螺母冷镦工序不良率</a:t>
+              <a:t>案例：降低工件机加工工序不良率</a:t>
             </a:r>
           </a:p>
           <a:p>
@@ -4852,7 +4852,7 @@
                 <a:latin typeface="SimSun"/>
                 <a:rFonts a:latin="SimSun" a:ea="SimSun"/>
               </a:rPr>
-              <a:t>  主要缺陷：头部裂纹(45%) + 对角尺寸超差(30%)</a:t>
+              <a:t>  主要缺陷：表面裂纹(45%) + 对角尺寸超差(30%)</a:t>
             </a:r>
           </a:p>
           <a:p>
@@ -6078,7 +6078,7 @@
                 <a:latin typeface="SimSun"/>
                 <a:rFonts a:latin="SimSun" a:ea="SimSun"/>
               </a:rPr>
-              <a:t>5. 紧固件行业全面适用</a:t>
+              <a:t>5. 制造业全面适用</a:t>
             </a:r>
           </a:p>
           <a:p>
@@ -7661,7 +7661,7 @@
                 <a:latin typeface="SimSun"/>
                 <a:rFonts a:latin="SimSun" a:ea="SimSun"/>
               </a:rPr>
-              <a:t>紧固件案例：定义"降低M10螺栓冷镦不良率"项目</a:t>
+              <a:t>产品案例：定义"降低某型号工件机加工不良率"项目</a:t>
             </a:r>
           </a:p>
         </p:txBody>
@@ -8001,7 +8001,7 @@
                 <a:latin typeface="SimSun"/>
                 <a:rFonts a:latin="SimSun" a:ea="SimSun"/>
               </a:rPr>
-              <a:t>紧固件案例：当前Cpk=0.89，PPM=28,000</a:t>
+              <a:t>产品案例：当前Cpk=0.89，PPM=28,000</a:t>
             </a:r>
           </a:p>
         </p:txBody>
@@ -8358,7 +8358,7 @@
                 <a:latin typeface="SimSun"/>
                 <a:rFonts a:latin="SimSun" a:ea="SimSun"/>
               </a:rPr>
-              <a:t>紧固件案例：根因为材料硬度波动(45%)、模具温度(25%)</a:t>
+              <a:t>产品案例：根因为材料硬度波动(45%)、模具温度(25%)</a:t>
             </a:r>
           </a:p>
         </p:txBody>
@@ -8715,7 +8715,7 @@
                 <a:latin typeface="SimSun"/>
                 <a:rFonts a:latin="SimSun" a:ea="SimSun"/>
               </a:rPr>
-              <a:t>紧固件案例：DOE优化模具温度和润滑参数</a:t>
+              <a:t>产品案例：DOE优化模具温度和润滑参数</a:t>
             </a:r>
           </a:p>
         </p:txBody>
@@ -9089,7 +9089,7 @@
                 <a:latin typeface="SimSun"/>
                 <a:rFonts a:latin="SimSun" a:ea="SimSun"/>
               </a:rPr>
-              <a:t>紧固件案例：不良率从2.8%降至0.3%，年节约120万元</a:t>
+              <a:t>产品案例：不良率从2.8%降至0.3%，年节约120万元</a:t>
             </a:r>
           </a:p>
         </p:txBody>
